--- a/zajecia/robo/robo_w1.pptx
+++ b/zajecia/robo/robo_w1.pptx
@@ -4015,42 +4015,23 @@
             <a:avLst/>
           </a:prstGeom>
           <a:solidFill>
-            <a:srgbClr val="1A3550"/>
+            <a:schemeClr val="bg1"/>
           </a:solidFill>
-          <a:ln w="38100">
+          <a:ln w="76200">
             <a:solidFill>
               <a:srgbClr val="00B4D8"/>
             </a:solidFill>
             <a:prstDash val="solid"/>
           </a:ln>
-        </p:spPr>
-      </p:sp>
-      <p:pic>
-        <p:nvPicPr>
-          <p:cNvPr id="5" name="Image 0" descr="preencoded.png"/>
-          <p:cNvPicPr>
-            <a:picLocks noChangeAspect="1"/>
-          </p:cNvPicPr>
-          <p:nvPr/>
-        </p:nvPicPr>
-        <p:blipFill>
-          <a:blip r:embed="rId3">
-            <a:extLst/>
-          </a:blip>
-          <a:stretch>
-            <a:fillRect/>
-          </a:stretch>
-        </p:blipFill>
-        <p:spPr>
-          <a:xfrm>
-            <a:off x="6739890" y="1164590"/>
-            <a:ext cx="1554480" cy="1554480"/>
-          </a:xfrm>
-          <a:prstGeom prst="rect">
-            <a:avLst/>
-          </a:prstGeom>
-        </p:spPr>
-      </p:pic>
+          <a:effectLst>
+            <a:outerShdw blurRad="50800" dist="38100" dir="2700000" algn="tl" rotWithShape="0">
+              <a:prstClr val="black">
+                <a:alpha val="40000"/>
+              </a:prstClr>
+            </a:outerShdw>
+          </a:effectLst>
+        </p:spPr>
+      </p:sp>
       <p:sp>
         <p:nvSpPr>
           <p:cNvPr id="6" name="Text 3"/>
@@ -4100,14 +4081,21 @@
         </p:nvSpPr>
         <p:spPr>
           <a:xfrm>
-            <a:off x="320040" y="1323201"/>
-            <a:ext cx="5760720" cy="553998"/>
+            <a:off x="320040" y="1230869"/>
+            <a:ext cx="5760720" cy="738664"/>
           </a:xfrm>
           <a:prstGeom prst="rect">
             <a:avLst/>
           </a:prstGeom>
           <a:noFill/>
           <a:ln/>
+          <a:effectLst>
+            <a:outerShdw blurRad="50800" dist="38100" dir="2700000" algn="tl" rotWithShape="0">
+              <a:prstClr val="black">
+                <a:alpha val="40000"/>
+              </a:prstClr>
+            </a:outerShdw>
+          </a:effectLst>
         </p:spPr>
         <p:txBody>
           <a:bodyPr wrap="square" lIns="0" tIns="0" rIns="0" bIns="0" rtlCol="0" anchor="ctr">
@@ -4119,7 +4107,7 @@
               <a:buNone/>
             </a:pPr>
             <a:r>
-              <a:rPr lang="en-US" sz="3600" b="1" dirty="0">
+              <a:rPr lang="en-US" sz="4800" b="1" dirty="0">
                 <a:solidFill>
                   <a:srgbClr val="FFFFFF"/>
                 </a:solidFill>
@@ -4129,7 +4117,7 @@
               </a:rPr>
               <a:t>WYKŁAD 1</a:t>
             </a:r>
-            <a:endParaRPr lang="en-US" sz="3600" dirty="0"/>
+            <a:endParaRPr lang="en-US" sz="4800" dirty="0"/>
           </a:p>
         </p:txBody>
       </p:sp>
@@ -4141,8 +4129,8 @@
         </p:nvSpPr>
         <p:spPr>
           <a:xfrm>
-            <a:off x="320040" y="2037993"/>
-            <a:ext cx="5760720" cy="861774"/>
+            <a:off x="320040" y="2144541"/>
+            <a:ext cx="5760720" cy="738664"/>
           </a:xfrm>
           <a:prstGeom prst="rect">
             <a:avLst/>
@@ -4157,7 +4145,7 @@
           <a:lstStyle/>
           <a:p>
             <a:r>
-              <a:rPr lang="en-US" sz="2800" b="1" spc="-20" dirty="0">
+              <a:rPr lang="en-US" sz="2400" b="1" spc="-20" dirty="0">
                 <a:solidFill>
                   <a:srgbClr val="90E0EF"/>
                 </a:solidFill>
@@ -4168,7 +4156,7 @@
               <a:t>Wprowadzenie do </a:t>
             </a:r>
             <a:r>
-              <a:rPr lang="en-US" sz="2800" b="1" spc="-20" dirty="0" err="1" smtClean="0">
+              <a:rPr lang="en-US" sz="2400" b="1" spc="-20" dirty="0" err="1" smtClean="0">
                 <a:solidFill>
                   <a:srgbClr val="90E0EF"/>
                 </a:solidFill>
@@ -4179,7 +4167,7 @@
               <a:t>percepcji</a:t>
             </a:r>
             <a:r>
-              <a:rPr lang="en-US" sz="2800" b="1" spc="-20" dirty="0" smtClean="0">
+              <a:rPr lang="en-US" sz="2400" b="1" spc="-20" dirty="0" smtClean="0">
                 <a:solidFill>
                   <a:srgbClr val="90E0EF"/>
                 </a:solidFill>
@@ -4190,7 +4178,7 @@
               <a:t> </a:t>
             </a:r>
             <a:r>
-              <a:rPr lang="pl-PL" sz="2800" b="1" spc="-20" dirty="0" smtClean="0">
+              <a:rPr lang="pl-PL" sz="2400" b="1" spc="-20" dirty="0" smtClean="0">
                 <a:solidFill>
                   <a:srgbClr val="90E0EF"/>
                 </a:solidFill>
@@ -4201,7 +4189,7 @@
               <a:t/>
             </a:r>
             <a:br>
-              <a:rPr lang="pl-PL" sz="2800" b="1" spc="-20" dirty="0" smtClean="0">
+              <a:rPr lang="pl-PL" sz="2400" b="1" spc="-20" dirty="0" smtClean="0">
                 <a:solidFill>
                   <a:srgbClr val="90E0EF"/>
                 </a:solidFill>
@@ -4211,7 +4199,7 @@
               </a:rPr>
             </a:br>
             <a:r>
-              <a:rPr lang="pl-PL" sz="2800" b="1" spc="-20" dirty="0" smtClean="0">
+              <a:rPr lang="pl-PL" sz="2400" b="1" spc="-20" dirty="0" smtClean="0">
                 <a:solidFill>
                   <a:srgbClr val="90E0EF"/>
                 </a:solidFill>
@@ -4222,7 +4210,7 @@
               <a:t>i </a:t>
             </a:r>
             <a:r>
-              <a:rPr lang="en-US" sz="2800" b="1" spc="-20" dirty="0" err="1" smtClean="0">
+              <a:rPr lang="en-US" sz="2400" b="1" spc="-20" dirty="0" err="1" smtClean="0">
                 <a:solidFill>
                   <a:srgbClr val="90E0EF"/>
                 </a:solidFill>
@@ -4233,7 +4221,7 @@
               <a:t>nawigacji</a:t>
             </a:r>
             <a:r>
-              <a:rPr lang="pl-PL" sz="2800" b="1" spc="-20" dirty="0" smtClean="0">
+              <a:rPr lang="pl-PL" sz="2400" b="1" spc="-20" dirty="0" smtClean="0">
                 <a:solidFill>
                   <a:srgbClr val="90E0EF"/>
                 </a:solidFill>
@@ -4244,7 +4232,7 @@
               <a:t> </a:t>
             </a:r>
             <a:r>
-              <a:rPr lang="en-US" sz="2800" b="1" spc="-20" dirty="0" err="1" smtClean="0">
+              <a:rPr lang="en-US" sz="2400" b="1" spc="-20" dirty="0" err="1" smtClean="0">
                 <a:solidFill>
                   <a:srgbClr val="90E0EF"/>
                 </a:solidFill>
@@ -4255,7 +4243,7 @@
               <a:t>robota</a:t>
             </a:r>
             <a:r>
-              <a:rPr lang="en-US" sz="2800" b="1" spc="-20" dirty="0" smtClean="0">
+              <a:rPr lang="en-US" sz="2400" b="1" spc="-20" dirty="0" smtClean="0">
                 <a:solidFill>
                   <a:srgbClr val="90E0EF"/>
                 </a:solidFill>
@@ -4266,7 +4254,7 @@
               <a:t> </a:t>
             </a:r>
             <a:r>
-              <a:rPr lang="en-US" sz="2800" b="1" spc="-20" dirty="0" err="1" smtClean="0">
+              <a:rPr lang="en-US" sz="2400" b="1" spc="-20" dirty="0" err="1" smtClean="0">
                 <a:solidFill>
                   <a:srgbClr val="90E0EF"/>
                 </a:solidFill>
@@ -4276,7 +4264,7 @@
               </a:rPr>
               <a:t>humanoidalnego</a:t>
             </a:r>
-            <a:endParaRPr lang="en-US" sz="2800" spc="-20" dirty="0"/>
+            <a:endParaRPr lang="en-US" sz="2400" spc="-20" dirty="0"/>
           </a:p>
         </p:txBody>
       </p:sp>
@@ -4346,290 +4334,305 @@
           </a:p>
         </p:txBody>
       </p:sp>
-      <p:sp>
-        <p:nvSpPr>
-          <p:cNvPr id="11" name="Shape 8"/>
-          <p:cNvSpPr/>
-          <p:nvPr/>
-        </p:nvSpPr>
-        <p:spPr>
+      <p:grpSp>
+        <p:nvGrpSpPr>
+          <p:cNvPr id="20" name="Grupa 19"/>
+          <p:cNvGrpSpPr/>
+          <p:nvPr/>
+        </p:nvGrpSpPr>
+        <p:grpSpPr>
           <a:xfrm>
             <a:off x="320040" y="4114800"/>
-            <a:ext cx="1325880" cy="548640"/>
-          </a:xfrm>
-          <a:prstGeom prst="rect">
-            <a:avLst/>
-          </a:prstGeom>
-          <a:solidFill>
-            <a:srgbClr val="1A3550"/>
-          </a:solidFill>
-          <a:ln w="12700">
+            <a:ext cx="8412480" cy="548640"/>
+            <a:chOff x="320040" y="4114800"/>
+            <a:chExt cx="5715000" cy="548640"/>
+          </a:xfrm>
+        </p:grpSpPr>
+        <p:sp>
+          <p:nvSpPr>
+            <p:cNvPr id="11" name="Shape 8"/>
+            <p:cNvSpPr/>
+            <p:nvPr/>
+          </p:nvSpPr>
+          <p:spPr>
+            <a:xfrm>
+              <a:off x="320040" y="4114800"/>
+              <a:ext cx="1325880" cy="548640"/>
+            </a:xfrm>
+            <a:prstGeom prst="rect">
+              <a:avLst/>
+            </a:prstGeom>
             <a:solidFill>
-              <a:srgbClr val="00B4D8"/>
+              <a:srgbClr val="1A3550"/>
             </a:solidFill>
-            <a:prstDash val="solid"/>
-          </a:ln>
-          <a:effectLst>
-            <a:outerShdw blurRad="76200" dist="25400" dir="8100000" algn="bl" rotWithShape="0">
-              <a:srgbClr val="000000">
-                <a:alpha val="12000"/>
-              </a:srgbClr>
-            </a:outerShdw>
-          </a:effectLst>
-        </p:spPr>
-      </p:sp>
-      <p:sp>
-        <p:nvSpPr>
-          <p:cNvPr id="12" name="Text 9"/>
-          <p:cNvSpPr/>
-          <p:nvPr/>
-        </p:nvSpPr>
-        <p:spPr>
-          <a:xfrm>
-            <a:off x="320040" y="4114800"/>
-            <a:ext cx="1325880" cy="548640"/>
-          </a:xfrm>
-          <a:prstGeom prst="rect">
-            <a:avLst/>
-          </a:prstGeom>
-          <a:noFill/>
-          <a:ln/>
-        </p:spPr>
-        <p:txBody>
-          <a:bodyPr wrap="square" lIns="0" tIns="0" rIns="0" bIns="0" rtlCol="0" anchor="ctr"/>
-          <a:lstStyle/>
-          <a:p>
-            <a:pPr marL="0" indent="0" algn="ctr">
-              <a:buNone/>
-            </a:pPr>
-            <a:r>
-              <a:rPr lang="en-US" sz="1600" b="1" dirty="0">
-                <a:solidFill>
-                  <a:srgbClr val="90E0EF"/>
-                </a:solidFill>
-                <a:latin typeface="Trebuchet MS" pitchFamily="34" charset="0"/>
-                <a:ea typeface="Trebuchet MS" pitchFamily="34" charset="-122"/>
-                <a:cs typeface="Trebuchet MS" pitchFamily="34" charset="-120"/>
-              </a:rPr>
-              <a:t>Percepcja</a:t>
-            </a:r>
-            <a:endParaRPr lang="en-US" sz="1600" dirty="0"/>
-          </a:p>
-        </p:txBody>
-      </p:sp>
-      <p:sp>
-        <p:nvSpPr>
-          <p:cNvPr id="13" name="Shape 10"/>
-          <p:cNvSpPr/>
-          <p:nvPr/>
-        </p:nvSpPr>
-        <p:spPr>
-          <a:xfrm>
-            <a:off x="1783080" y="4114800"/>
-            <a:ext cx="1325880" cy="548640"/>
-          </a:xfrm>
-          <a:prstGeom prst="rect">
-            <a:avLst/>
-          </a:prstGeom>
-          <a:solidFill>
-            <a:srgbClr val="1A3550"/>
-          </a:solidFill>
-          <a:ln w="12700">
+            <a:ln w="12700">
+              <a:solidFill>
+                <a:srgbClr val="00B4D8"/>
+              </a:solidFill>
+              <a:prstDash val="solid"/>
+            </a:ln>
+            <a:effectLst>
+              <a:outerShdw blurRad="76200" dist="25400" dir="8100000" algn="bl" rotWithShape="0">
+                <a:srgbClr val="000000">
+                  <a:alpha val="12000"/>
+                </a:srgbClr>
+              </a:outerShdw>
+            </a:effectLst>
+          </p:spPr>
+        </p:sp>
+        <p:sp>
+          <p:nvSpPr>
+            <p:cNvPr id="12" name="Text 9"/>
+            <p:cNvSpPr/>
+            <p:nvPr/>
+          </p:nvSpPr>
+          <p:spPr>
+            <a:xfrm>
+              <a:off x="320040" y="4114800"/>
+              <a:ext cx="1325880" cy="548640"/>
+            </a:xfrm>
+            <a:prstGeom prst="rect">
+              <a:avLst/>
+            </a:prstGeom>
+            <a:noFill/>
+            <a:ln/>
+          </p:spPr>
+          <p:txBody>
+            <a:bodyPr wrap="square" lIns="0" tIns="0" rIns="0" bIns="0" rtlCol="0" anchor="ctr"/>
+            <a:lstStyle/>
+            <a:p>
+              <a:pPr marL="0" indent="0" algn="ctr">
+                <a:buNone/>
+              </a:pPr>
+              <a:r>
+                <a:rPr lang="en-US" sz="1600" b="1" dirty="0">
+                  <a:solidFill>
+                    <a:srgbClr val="90E0EF"/>
+                  </a:solidFill>
+                  <a:latin typeface="Trebuchet MS" pitchFamily="34" charset="0"/>
+                  <a:ea typeface="Trebuchet MS" pitchFamily="34" charset="-122"/>
+                  <a:cs typeface="Trebuchet MS" pitchFamily="34" charset="-120"/>
+                </a:rPr>
+                <a:t>Percepcja</a:t>
+              </a:r>
+              <a:endParaRPr lang="en-US" sz="1600" dirty="0"/>
+            </a:p>
+          </p:txBody>
+        </p:sp>
+        <p:sp>
+          <p:nvSpPr>
+            <p:cNvPr id="13" name="Shape 10"/>
+            <p:cNvSpPr/>
+            <p:nvPr/>
+          </p:nvSpPr>
+          <p:spPr>
+            <a:xfrm>
+              <a:off x="1783080" y="4114800"/>
+              <a:ext cx="1325880" cy="548640"/>
+            </a:xfrm>
+            <a:prstGeom prst="rect">
+              <a:avLst/>
+            </a:prstGeom>
             <a:solidFill>
-              <a:srgbClr val="00B4D8"/>
+              <a:srgbClr val="1A3550"/>
             </a:solidFill>
-            <a:prstDash val="solid"/>
-          </a:ln>
-          <a:effectLst>
-            <a:outerShdw blurRad="76200" dist="25400" dir="8100000" algn="bl" rotWithShape="0">
-              <a:srgbClr val="000000">
-                <a:alpha val="12000"/>
-              </a:srgbClr>
-            </a:outerShdw>
-          </a:effectLst>
-        </p:spPr>
-      </p:sp>
-      <p:sp>
-        <p:nvSpPr>
-          <p:cNvPr id="14" name="Text 11"/>
-          <p:cNvSpPr/>
-          <p:nvPr/>
-        </p:nvSpPr>
-        <p:spPr>
-          <a:xfrm>
-            <a:off x="1783080" y="4114800"/>
-            <a:ext cx="1325880" cy="548640"/>
-          </a:xfrm>
-          <a:prstGeom prst="rect">
-            <a:avLst/>
-          </a:prstGeom>
-          <a:noFill/>
-          <a:ln/>
-        </p:spPr>
-        <p:txBody>
-          <a:bodyPr wrap="square" lIns="0" tIns="0" rIns="0" bIns="0" rtlCol="0" anchor="ctr"/>
-          <a:lstStyle/>
-          <a:p>
-            <a:pPr marL="0" indent="0" algn="ctr">
-              <a:buNone/>
-            </a:pPr>
-            <a:r>
-              <a:rPr lang="en-US" sz="1600" b="1" dirty="0">
-                <a:solidFill>
-                  <a:srgbClr val="90E0EF"/>
-                </a:solidFill>
-                <a:latin typeface="Trebuchet MS" pitchFamily="34" charset="0"/>
-                <a:ea typeface="Trebuchet MS" pitchFamily="34" charset="-122"/>
-                <a:cs typeface="Trebuchet MS" pitchFamily="34" charset="-120"/>
-              </a:rPr>
-              <a:t>Mapowanie</a:t>
-            </a:r>
-            <a:endParaRPr lang="en-US" sz="1600" dirty="0"/>
-          </a:p>
-        </p:txBody>
-      </p:sp>
-      <p:sp>
-        <p:nvSpPr>
-          <p:cNvPr id="15" name="Shape 12"/>
-          <p:cNvSpPr/>
-          <p:nvPr/>
-        </p:nvSpPr>
-        <p:spPr>
-          <a:xfrm>
-            <a:off x="3246120" y="4114800"/>
-            <a:ext cx="1325880" cy="548640"/>
-          </a:xfrm>
-          <a:prstGeom prst="rect">
-            <a:avLst/>
-          </a:prstGeom>
-          <a:solidFill>
-            <a:srgbClr val="1A3550"/>
-          </a:solidFill>
-          <a:ln w="12700">
+            <a:ln w="12700">
+              <a:solidFill>
+                <a:srgbClr val="00B4D8"/>
+              </a:solidFill>
+              <a:prstDash val="solid"/>
+            </a:ln>
+            <a:effectLst>
+              <a:outerShdw blurRad="76200" dist="25400" dir="8100000" algn="bl" rotWithShape="0">
+                <a:srgbClr val="000000">
+                  <a:alpha val="12000"/>
+                </a:srgbClr>
+              </a:outerShdw>
+            </a:effectLst>
+          </p:spPr>
+        </p:sp>
+        <p:sp>
+          <p:nvSpPr>
+            <p:cNvPr id="14" name="Text 11"/>
+            <p:cNvSpPr/>
+            <p:nvPr/>
+          </p:nvSpPr>
+          <p:spPr>
+            <a:xfrm>
+              <a:off x="1783080" y="4114800"/>
+              <a:ext cx="1325880" cy="548640"/>
+            </a:xfrm>
+            <a:prstGeom prst="rect">
+              <a:avLst/>
+            </a:prstGeom>
+            <a:noFill/>
+            <a:ln/>
+          </p:spPr>
+          <p:txBody>
+            <a:bodyPr wrap="square" lIns="0" tIns="0" rIns="0" bIns="0" rtlCol="0" anchor="ctr"/>
+            <a:lstStyle/>
+            <a:p>
+              <a:pPr marL="0" indent="0" algn="ctr">
+                <a:buNone/>
+              </a:pPr>
+              <a:r>
+                <a:rPr lang="en-US" sz="1600" b="1" dirty="0">
+                  <a:solidFill>
+                    <a:srgbClr val="90E0EF"/>
+                  </a:solidFill>
+                  <a:latin typeface="Trebuchet MS" pitchFamily="34" charset="0"/>
+                  <a:ea typeface="Trebuchet MS" pitchFamily="34" charset="-122"/>
+                  <a:cs typeface="Trebuchet MS" pitchFamily="34" charset="-120"/>
+                </a:rPr>
+                <a:t>Mapowanie</a:t>
+              </a:r>
+              <a:endParaRPr lang="en-US" sz="1600" dirty="0"/>
+            </a:p>
+          </p:txBody>
+        </p:sp>
+        <p:sp>
+          <p:nvSpPr>
+            <p:cNvPr id="15" name="Shape 12"/>
+            <p:cNvSpPr/>
+            <p:nvPr/>
+          </p:nvSpPr>
+          <p:spPr>
+            <a:xfrm>
+              <a:off x="3246120" y="4114800"/>
+              <a:ext cx="1325880" cy="548640"/>
+            </a:xfrm>
+            <a:prstGeom prst="rect">
+              <a:avLst/>
+            </a:prstGeom>
             <a:solidFill>
-              <a:srgbClr val="00B4D8"/>
+              <a:srgbClr val="1A3550"/>
             </a:solidFill>
-            <a:prstDash val="solid"/>
-          </a:ln>
-          <a:effectLst>
-            <a:outerShdw blurRad="76200" dist="25400" dir="8100000" algn="bl" rotWithShape="0">
-              <a:srgbClr val="000000">
-                <a:alpha val="12000"/>
-              </a:srgbClr>
-            </a:outerShdw>
-          </a:effectLst>
-        </p:spPr>
-      </p:sp>
-      <p:sp>
-        <p:nvSpPr>
-          <p:cNvPr id="16" name="Text 13"/>
-          <p:cNvSpPr/>
-          <p:nvPr/>
-        </p:nvSpPr>
-        <p:spPr>
-          <a:xfrm>
-            <a:off x="3246120" y="4114800"/>
-            <a:ext cx="1325880" cy="548640"/>
-          </a:xfrm>
-          <a:prstGeom prst="rect">
-            <a:avLst/>
-          </a:prstGeom>
-          <a:noFill/>
-          <a:ln/>
-        </p:spPr>
-        <p:txBody>
-          <a:bodyPr wrap="square" lIns="0" tIns="0" rIns="0" bIns="0" rtlCol="0" anchor="ctr"/>
-          <a:lstStyle/>
-          <a:p>
-            <a:pPr marL="0" indent="0" algn="ctr">
-              <a:buNone/>
-            </a:pPr>
-            <a:r>
-              <a:rPr lang="en-US" sz="1600" b="1" dirty="0">
-                <a:solidFill>
-                  <a:srgbClr val="90E0EF"/>
-                </a:solidFill>
-                <a:latin typeface="Trebuchet MS" pitchFamily="34" charset="0"/>
-                <a:ea typeface="Trebuchet MS" pitchFamily="34" charset="-122"/>
-                <a:cs typeface="Trebuchet MS" pitchFamily="34" charset="-120"/>
-              </a:rPr>
-              <a:t>Sensory</a:t>
-            </a:r>
-            <a:endParaRPr lang="en-US" sz="1600" dirty="0"/>
-          </a:p>
-        </p:txBody>
-      </p:sp>
-      <p:sp>
-        <p:nvSpPr>
-          <p:cNvPr id="17" name="Shape 14"/>
-          <p:cNvSpPr/>
-          <p:nvPr/>
-        </p:nvSpPr>
-        <p:spPr>
-          <a:xfrm>
-            <a:off x="4709160" y="4114800"/>
-            <a:ext cx="1325880" cy="548640"/>
-          </a:xfrm>
-          <a:prstGeom prst="rect">
-            <a:avLst/>
-          </a:prstGeom>
-          <a:solidFill>
-            <a:srgbClr val="1A3550"/>
-          </a:solidFill>
-          <a:ln w="12700">
+            <a:ln w="12700">
+              <a:solidFill>
+                <a:srgbClr val="00B4D8"/>
+              </a:solidFill>
+              <a:prstDash val="solid"/>
+            </a:ln>
+            <a:effectLst>
+              <a:outerShdw blurRad="76200" dist="25400" dir="8100000" algn="bl" rotWithShape="0">
+                <a:srgbClr val="000000">
+                  <a:alpha val="12000"/>
+                </a:srgbClr>
+              </a:outerShdw>
+            </a:effectLst>
+          </p:spPr>
+        </p:sp>
+        <p:sp>
+          <p:nvSpPr>
+            <p:cNvPr id="16" name="Text 13"/>
+            <p:cNvSpPr/>
+            <p:nvPr/>
+          </p:nvSpPr>
+          <p:spPr>
+            <a:xfrm>
+              <a:off x="3246120" y="4114800"/>
+              <a:ext cx="1325880" cy="548640"/>
+            </a:xfrm>
+            <a:prstGeom prst="rect">
+              <a:avLst/>
+            </a:prstGeom>
+            <a:noFill/>
+            <a:ln/>
+          </p:spPr>
+          <p:txBody>
+            <a:bodyPr wrap="square" lIns="0" tIns="0" rIns="0" bIns="0" rtlCol="0" anchor="ctr"/>
+            <a:lstStyle/>
+            <a:p>
+              <a:pPr marL="0" indent="0" algn="ctr">
+                <a:buNone/>
+              </a:pPr>
+              <a:r>
+                <a:rPr lang="en-US" sz="1600" b="1" dirty="0">
+                  <a:solidFill>
+                    <a:srgbClr val="90E0EF"/>
+                  </a:solidFill>
+                  <a:latin typeface="Trebuchet MS" pitchFamily="34" charset="0"/>
+                  <a:ea typeface="Trebuchet MS" pitchFamily="34" charset="-122"/>
+                  <a:cs typeface="Trebuchet MS" pitchFamily="34" charset="-120"/>
+                </a:rPr>
+                <a:t>Sensory</a:t>
+              </a:r>
+              <a:endParaRPr lang="en-US" sz="1600" dirty="0"/>
+            </a:p>
+          </p:txBody>
+        </p:sp>
+        <p:sp>
+          <p:nvSpPr>
+            <p:cNvPr id="17" name="Shape 14"/>
+            <p:cNvSpPr/>
+            <p:nvPr/>
+          </p:nvSpPr>
+          <p:spPr>
+            <a:xfrm>
+              <a:off x="4709160" y="4114800"/>
+              <a:ext cx="1325880" cy="548640"/>
+            </a:xfrm>
+            <a:prstGeom prst="rect">
+              <a:avLst/>
+            </a:prstGeom>
             <a:solidFill>
-              <a:srgbClr val="00B4D8"/>
+              <a:srgbClr val="1A3550"/>
             </a:solidFill>
-            <a:prstDash val="solid"/>
-          </a:ln>
-          <a:effectLst>
-            <a:outerShdw blurRad="76200" dist="25400" dir="8100000" algn="bl" rotWithShape="0">
-              <a:srgbClr val="000000">
-                <a:alpha val="12000"/>
-              </a:srgbClr>
-            </a:outerShdw>
-          </a:effectLst>
-        </p:spPr>
-      </p:sp>
-      <p:sp>
-        <p:nvSpPr>
-          <p:cNvPr id="18" name="Text 15"/>
-          <p:cNvSpPr/>
-          <p:nvPr/>
-        </p:nvSpPr>
-        <p:spPr>
-          <a:xfrm>
-            <a:off x="4709160" y="4114800"/>
-            <a:ext cx="1325880" cy="548640"/>
-          </a:xfrm>
-          <a:prstGeom prst="rect">
-            <a:avLst/>
-          </a:prstGeom>
-          <a:noFill/>
-          <a:ln/>
-        </p:spPr>
-        <p:txBody>
-          <a:bodyPr wrap="square" lIns="0" tIns="0" rIns="0" bIns="0" rtlCol="0" anchor="ctr"/>
-          <a:lstStyle/>
-          <a:p>
-            <a:pPr marL="0" indent="0" algn="ctr">
-              <a:buNone/>
-            </a:pPr>
-            <a:r>
-              <a:rPr lang="en-US" sz="1600" b="1" dirty="0">
-                <a:solidFill>
-                  <a:srgbClr val="90E0EF"/>
-                </a:solidFill>
-                <a:latin typeface="Trebuchet MS" pitchFamily="34" charset="0"/>
-                <a:ea typeface="Trebuchet MS" pitchFamily="34" charset="-122"/>
-                <a:cs typeface="Trebuchet MS" pitchFamily="34" charset="-120"/>
-              </a:rPr>
-              <a:t>Architektura</a:t>
-            </a:r>
-            <a:endParaRPr lang="en-US" sz="1600" dirty="0"/>
-          </a:p>
-        </p:txBody>
-      </p:sp>
+            <a:ln w="12700">
+              <a:solidFill>
+                <a:srgbClr val="00B4D8"/>
+              </a:solidFill>
+              <a:prstDash val="solid"/>
+            </a:ln>
+            <a:effectLst>
+              <a:outerShdw blurRad="76200" dist="25400" dir="8100000" algn="bl" rotWithShape="0">
+                <a:srgbClr val="000000">
+                  <a:alpha val="12000"/>
+                </a:srgbClr>
+              </a:outerShdw>
+            </a:effectLst>
+          </p:spPr>
+        </p:sp>
+        <p:sp>
+          <p:nvSpPr>
+            <p:cNvPr id="18" name="Text 15"/>
+            <p:cNvSpPr/>
+            <p:nvPr/>
+          </p:nvSpPr>
+          <p:spPr>
+            <a:xfrm>
+              <a:off x="4709160" y="4114800"/>
+              <a:ext cx="1325880" cy="548640"/>
+            </a:xfrm>
+            <a:prstGeom prst="rect">
+              <a:avLst/>
+            </a:prstGeom>
+            <a:noFill/>
+            <a:ln/>
+          </p:spPr>
+          <p:txBody>
+            <a:bodyPr wrap="square" lIns="0" tIns="0" rIns="0" bIns="0" rtlCol="0" anchor="ctr"/>
+            <a:lstStyle/>
+            <a:p>
+              <a:pPr marL="0" indent="0" algn="ctr">
+                <a:buNone/>
+              </a:pPr>
+              <a:r>
+                <a:rPr lang="en-US" sz="1600" b="1" dirty="0">
+                  <a:solidFill>
+                    <a:srgbClr val="90E0EF"/>
+                  </a:solidFill>
+                  <a:latin typeface="Trebuchet MS" pitchFamily="34" charset="0"/>
+                  <a:ea typeface="Trebuchet MS" pitchFamily="34" charset="-122"/>
+                  <a:cs typeface="Trebuchet MS" pitchFamily="34" charset="-120"/>
+                </a:rPr>
+                <a:t>Architektura</a:t>
+              </a:r>
+              <a:endParaRPr lang="en-US" sz="1600" dirty="0"/>
+            </a:p>
+          </p:txBody>
+        </p:sp>
+      </p:grpSp>
       <p:sp>
         <p:nvSpPr>
           <p:cNvPr id="19" name="Text 7"/>
@@ -4667,7 +4670,7 @@
                 <a:ea typeface="Calibri" pitchFamily="34" charset="-122"/>
                 <a:cs typeface="Calibri" pitchFamily="34" charset="-120"/>
               </a:rPr>
-              <a:t>v1.0.1</a:t>
+              <a:t>v1.0.2</a:t>
             </a:r>
             <a:endParaRPr lang="en-US" sz="1000" i="1" dirty="0">
               <a:solidFill>
@@ -4679,6 +4682,30 @@
           </a:p>
         </p:txBody>
       </p:sp>
+      <p:pic>
+        <p:nvPicPr>
+          <p:cNvPr id="21" name="Image 0" descr="preencoded.png"/>
+          <p:cNvPicPr>
+            <a:picLocks noChangeAspect="1"/>
+          </p:cNvPicPr>
+          <p:nvPr/>
+        </p:nvPicPr>
+        <p:blipFill>
+          <a:blip r:embed="rId3"/>
+          <a:stretch>
+            <a:fillRect/>
+          </a:stretch>
+        </p:blipFill>
+        <p:spPr>
+          <a:xfrm>
+            <a:off x="6949440" y="1364932"/>
+            <a:ext cx="1097280" cy="1097280"/>
+          </a:xfrm>
+          <a:prstGeom prst="rect">
+            <a:avLst/>
+          </a:prstGeom>
+        </p:spPr>
+      </p:pic>
     </p:spTree>
   </p:cSld>
   <p:clrMapOvr>
@@ -7892,6 +7919,13 @@
           </a:prstGeom>
           <a:noFill/>
           <a:ln/>
+          <a:effectLst>
+            <a:outerShdw blurRad="50800" dist="38100" dir="2700000" algn="tl" rotWithShape="0">
+              <a:prstClr val="black">
+                <a:alpha val="40000"/>
+              </a:prstClr>
+            </a:outerShdw>
+          </a:effectLst>
         </p:spPr>
         <p:txBody>
           <a:bodyPr wrap="square" lIns="0" tIns="0" rIns="0" bIns="0" rtlCol="0" anchor="ctr"/>
@@ -7932,14 +7966,21 @@
             <a:avLst/>
           </a:prstGeom>
           <a:solidFill>
-            <a:srgbClr val="0D1B2A"/>
+            <a:schemeClr val="bg1"/>
           </a:solidFill>
-          <a:ln w="25400">
+          <a:ln w="57150">
             <a:solidFill>
               <a:srgbClr val="00B4D8"/>
             </a:solidFill>
             <a:prstDash val="solid"/>
           </a:ln>
+          <a:effectLst>
+            <a:outerShdw blurRad="50800" dist="38100" dir="2700000" algn="tl" rotWithShape="0">
+              <a:prstClr val="black">
+                <a:alpha val="40000"/>
+              </a:prstClr>
+            </a:outerShdw>
+          </a:effectLst>
         </p:spPr>
       </p:sp>
       <p:pic>
@@ -7958,8 +7999,8 @@
         </p:blipFill>
         <p:spPr>
           <a:xfrm>
-            <a:off x="7406640" y="1645920"/>
-            <a:ext cx="1097280" cy="1097280"/>
+            <a:off x="7429500" y="1668780"/>
+            <a:ext cx="1051560" cy="1051560"/>
           </a:xfrm>
           <a:prstGeom prst="rect">
             <a:avLst/>
@@ -8067,6 +8108,13 @@
             </a:solidFill>
             <a:prstDash val="solid"/>
           </a:ln>
+          <a:effectLst>
+            <a:outerShdw blurRad="50800" dist="38100" dir="2700000" algn="tl" rotWithShape="0">
+              <a:prstClr val="black">
+                <a:alpha val="40000"/>
+              </a:prstClr>
+            </a:outerShdw>
+          </a:effectLst>
         </p:spPr>
       </p:sp>
       <p:sp>
@@ -8078,7 +8126,7 @@
         <p:spPr>
           <a:xfrm>
             <a:off x="2926080" y="2743200"/>
-            <a:ext cx="3931920" cy="731520"/>
+            <a:ext cx="3931920" cy="457200"/>
           </a:xfrm>
           <a:prstGeom prst="rect">
             <a:avLst/>
@@ -12961,7 +13009,7 @@
         <p:spPr>
           <a:xfrm>
             <a:off x="384048" y="1234440"/>
-            <a:ext cx="3941064" cy="642823"/>
+            <a:ext cx="2305812" cy="642823"/>
           </a:xfrm>
           <a:prstGeom prst="rect">
             <a:avLst/>
@@ -13096,7 +13144,7 @@
         <p:spPr>
           <a:xfrm>
             <a:off x="4818888" y="1234440"/>
-            <a:ext cx="3941064" cy="642823"/>
+            <a:ext cx="2305812" cy="642823"/>
           </a:xfrm>
           <a:prstGeom prst="rect">
             <a:avLst/>
@@ -13231,7 +13279,7 @@
         <p:spPr>
           <a:xfrm>
             <a:off x="384048" y="2689860"/>
-            <a:ext cx="3941064" cy="642823"/>
+            <a:ext cx="2305812" cy="642823"/>
           </a:xfrm>
           <a:prstGeom prst="rect">
             <a:avLst/>
@@ -13366,7 +13414,7 @@
         <p:spPr>
           <a:xfrm>
             <a:off x="4818888" y="2689860"/>
-            <a:ext cx="3941064" cy="642823"/>
+            <a:ext cx="2305812" cy="642823"/>
           </a:xfrm>
           <a:prstGeom prst="rect">
             <a:avLst/>
@@ -18721,6 +18769,13 @@
           </a:prstGeom>
           <a:noFill/>
           <a:ln/>
+          <a:effectLst>
+            <a:outerShdw blurRad="50800" dist="38100" dir="2700000" algn="tl" rotWithShape="0">
+              <a:prstClr val="black">
+                <a:alpha val="40000"/>
+              </a:prstClr>
+            </a:outerShdw>
+          </a:effectLst>
         </p:spPr>
         <p:txBody>
           <a:bodyPr wrap="square" lIns="0" tIns="0" rIns="0" bIns="0" rtlCol="0" anchor="ctr"/>
@@ -18761,14 +18816,21 @@
             <a:avLst/>
           </a:prstGeom>
           <a:solidFill>
-            <a:srgbClr val="0D1B2A"/>
+            <a:schemeClr val="bg1"/>
           </a:solidFill>
-          <a:ln w="25400">
+          <a:ln w="57150">
             <a:solidFill>
               <a:srgbClr val="00B4D8"/>
             </a:solidFill>
             <a:prstDash val="solid"/>
           </a:ln>
+          <a:effectLst>
+            <a:outerShdw blurRad="50800" dist="38100" dir="2700000" algn="tl" rotWithShape="0">
+              <a:prstClr val="black">
+                <a:alpha val="40000"/>
+              </a:prstClr>
+            </a:outerShdw>
+          </a:effectLst>
         </p:spPr>
       </p:sp>
       <p:pic>
@@ -18962,6 +19024,13 @@
             </a:solidFill>
             <a:prstDash val="solid"/>
           </a:ln>
+          <a:effectLst>
+            <a:outerShdw blurRad="50800" dist="38100" dir="2700000" algn="tl" rotWithShape="0">
+              <a:prstClr val="black">
+                <a:alpha val="40000"/>
+              </a:prstClr>
+            </a:outerShdw>
+          </a:effectLst>
         </p:spPr>
       </p:sp>
       <p:sp>
@@ -18973,7 +19042,7 @@
         <p:spPr>
           <a:xfrm>
             <a:off x="2926080" y="2743200"/>
-            <a:ext cx="3931920" cy="731520"/>
+            <a:ext cx="3931920" cy="510540"/>
           </a:xfrm>
           <a:prstGeom prst="rect">
             <a:avLst/>
@@ -25238,6 +25307,13 @@
           </a:prstGeom>
           <a:noFill/>
           <a:ln/>
+          <a:effectLst>
+            <a:outerShdw blurRad="50800" dist="38100" dir="2700000" algn="tl" rotWithShape="0">
+              <a:prstClr val="black">
+                <a:alpha val="40000"/>
+              </a:prstClr>
+            </a:outerShdw>
+          </a:effectLst>
         </p:spPr>
         <p:txBody>
           <a:bodyPr wrap="square" lIns="0" tIns="0" rIns="0" bIns="0" rtlCol="0" anchor="ctr"/>
@@ -25278,14 +25354,21 @@
             <a:avLst/>
           </a:prstGeom>
           <a:solidFill>
-            <a:srgbClr val="0D1B2A"/>
+            <a:schemeClr val="bg1"/>
           </a:solidFill>
-          <a:ln w="25400">
+          <a:ln w="57150">
             <a:solidFill>
               <a:srgbClr val="00B4D8"/>
             </a:solidFill>
             <a:prstDash val="solid"/>
           </a:ln>
+          <a:effectLst>
+            <a:outerShdw blurRad="50800" dist="38100" dir="2700000" algn="tl" rotWithShape="0">
+              <a:prstClr val="black">
+                <a:alpha val="40000"/>
+              </a:prstClr>
+            </a:outerShdw>
+          </a:effectLst>
         </p:spPr>
       </p:sp>
       <p:pic>
@@ -25430,6 +25513,13 @@
             </a:solidFill>
             <a:prstDash val="solid"/>
           </a:ln>
+          <a:effectLst>
+            <a:outerShdw blurRad="50800" dist="38100" dir="2700000" algn="tl" rotWithShape="0">
+              <a:prstClr val="black">
+                <a:alpha val="40000"/>
+              </a:prstClr>
+            </a:outerShdw>
+          </a:effectLst>
         </p:spPr>
       </p:sp>
       <p:sp>
@@ -25441,7 +25531,7 @@
         <p:spPr>
           <a:xfrm>
             <a:off x="2926080" y="2743200"/>
-            <a:ext cx="3931920" cy="731520"/>
+            <a:ext cx="3931920" cy="464820"/>
           </a:xfrm>
           <a:prstGeom prst="rect">
             <a:avLst/>
@@ -25673,7 +25763,7 @@
         <p:spPr>
           <a:xfrm>
             <a:off x="4709160" y="1097280"/>
-            <a:ext cx="4160520" cy="2773680"/>
+            <a:ext cx="4206240" cy="2773680"/>
           </a:xfrm>
           <a:prstGeom prst="rect">
             <a:avLst/>
@@ -25780,7 +25870,7 @@
         <p:spPr>
           <a:xfrm>
             <a:off x="4709160" y="1097280"/>
-            <a:ext cx="4160520" cy="384048"/>
+            <a:ext cx="4206240" cy="384048"/>
           </a:xfrm>
           <a:prstGeom prst="rect">
             <a:avLst/>
@@ -25855,7 +25945,7 @@
         <p:spPr>
           <a:xfrm>
             <a:off x="362396" y="1600200"/>
-            <a:ext cx="3996244" cy="2186940"/>
+            <a:ext cx="3996244" cy="2165584"/>
           </a:xfrm>
           <a:prstGeom prst="rect">
             <a:avLst/>
@@ -25864,7 +25954,9 @@
           <a:ln/>
         </p:spPr>
         <p:txBody>
-          <a:bodyPr wrap="square" lIns="63500" tIns="101600" rIns="63500" bIns="63500" rtlCol="0" anchor="t"/>
+          <a:bodyPr wrap="square" lIns="63500" tIns="36000" rIns="63500" bIns="0" rtlCol="0" anchor="t">
+            <a:spAutoFit/>
+          </a:bodyPr>
           <a:lstStyle/>
           <a:p>
             <a:pPr marL="144000" indent="-144000">
@@ -26046,7 +26138,7 @@
           <a:ln/>
         </p:spPr>
         <p:txBody>
-          <a:bodyPr wrap="square" lIns="63500" tIns="101600" rIns="63500" bIns="63500" rtlCol="0" anchor="t"/>
+          <a:bodyPr wrap="square" lIns="63500" tIns="36000" rIns="63500" bIns="0" rtlCol="0" anchor="t"/>
           <a:lstStyle/>
           <a:p>
             <a:pPr marL="144000" indent="-144000">
@@ -26218,7 +26310,7 @@
         </p:nvSpPr>
         <p:spPr>
           <a:xfrm>
-            <a:off x="251460" y="4122420"/>
+            <a:off x="251460" y="4107180"/>
             <a:ext cx="8663940" cy="876300"/>
           </a:xfrm>
           <a:prstGeom prst="rect">
@@ -26250,7 +26342,7 @@
           <a:p>
             <a:pPr algn="just">
               <a:lnSpc>
-                <a:spcPts val="1500"/>
+                <a:spcPts val="1600"/>
               </a:lnSpc>
             </a:pPr>
             <a:r>
@@ -26934,7 +27026,7 @@
               <a:buNone/>
             </a:pPr>
             <a:r>
-              <a:rPr lang="en-US" sz="2800" b="1" dirty="0" smtClean="0">
+              <a:rPr lang="en-US" sz="3600" b="1" dirty="0" smtClean="0">
                 <a:solidFill>
                   <a:srgbClr val="FFFFFF"/>
                 </a:solidFill>
@@ -26944,7 +27036,7 @@
               </a:rPr>
               <a:t>PODSUMOWANIE</a:t>
             </a:r>
-            <a:endParaRPr lang="en-US" sz="2800" dirty="0"/>
+            <a:endParaRPr lang="en-US" sz="3600" dirty="0"/>
           </a:p>
         </p:txBody>
       </p:sp>
@@ -26971,6 +27063,13 @@
             </a:solidFill>
             <a:prstDash val="solid"/>
           </a:ln>
+          <a:effectLst>
+            <a:outerShdw blurRad="50800" dist="38100" dir="2700000" algn="tl" rotWithShape="0">
+              <a:prstClr val="black">
+                <a:alpha val="40000"/>
+              </a:prstClr>
+            </a:outerShdw>
+          </a:effectLst>
         </p:spPr>
       </p:sp>
       <p:sp>
@@ -28800,7 +28899,23 @@
                   <a:schemeClr val="bg1"/>
                 </a:solidFill>
               </a:rPr>
-              <a:t> nawigacyjnie bardzo różni się od platformy kołowej. Robot kołowy ma stabilną bazę, prostą kinematykę i zwykle porusza się po płaskiej posadzce, więc wiele klasycznych metod działa tam bardzo dobrze. Humanoid natomiast funkcjonuje w warunkach dynamicznej równowagi, ma złożoną kinematykę, ryzyko utraty stabilności przy każdym kroku i musi radzić sobie ze schodami, progami, nierównościami oraz drzwiami. Dlatego w jego przypadku sama trajektoria nie wystarcza — trzeba planować także kroki i trajektorię środka masy. </a:t>
+              <a:t> nawigacyjnie bardzo różni się od platformy kołowej. Robot kołowy ma stabilną bazę, prostą kinematykę i zwykle porusza się po płaskiej posadzce, więc wiele klasycznych metod działa tam bardzo dobrze. Humanoid natomiast funkcjonuje w warunkach dynamicznej równowagi, ma złożoną kinematykę, ryzyko utraty stabilności przy każdym kroku i musi radzić sobie ze schodami, progami, nierównościami oraz drzwiami. Dlatego w jego przypadku sama trajektoria nie </a:t>
+            </a:r>
+            <a:r>
+              <a:rPr lang="pl-PL" sz="1400" spc="-40" dirty="0" smtClean="0">
+                <a:solidFill>
+                  <a:schemeClr val="bg1"/>
+                </a:solidFill>
+              </a:rPr>
+              <a:t>wystarcza, </a:t>
+            </a:r>
+            <a:r>
+              <a:rPr lang="pl-PL" sz="1400" spc="-40" dirty="0">
+                <a:solidFill>
+                  <a:schemeClr val="bg1"/>
+                </a:solidFill>
+              </a:rPr>
+              <a:t>trzeba planować także kroki i trajektorię środka masy. </a:t>
             </a:r>
           </a:p>
         </p:txBody>
